--- a/modulo-2/PF1822-desarrollo-con-ia/produccion/videos/AE2-capsula.pptx
+++ b/modulo-2/PF1822-desarrollo-con-ia/produccion/videos/AE2-capsula.pptx
@@ -18,6 +18,7 @@
     <p:sldId id="263" r:id="rId17"/>
     <p:sldId id="264" r:id="rId18"/>
     <p:sldId id="265" r:id="rId19"/>
+    <p:sldId id="266" r:id="rId20"/>
   </p:sldIdLst>
   <p:sldSz cx="12192000" cy="6858000"/>
   <p:notesSz cx="6858000" cy="9144000"/>
@@ -161,7 +162,7 @@
           <a:p>
             <a:r>
               <a:rPr lang="es-CL" dirty="0"/>
-              <a:t>Te doy la bienvenida a la cápsula 2 del módulo 2: Consumir modelos por API. "Hablar con un modelo es hacer una solicitud HTTP bien hecha".</a:t>
+              <a:t>Te doy la bienvenida a la cápsula 2 del módulo 2, Introducción a modelos generativos y consumo por API: Consumir modelos por API. "Hablar con un modelo es hacer una solicitud HTTP bien hecha".</a:t>
             </a:r>
           </a:p>
         </p:txBody>
@@ -220,6 +221,65 @@
           <a:p>
             <a:r>
               <a:rPr lang="es-CL" dirty="0"/>
+              <a:t>Modularizar, documentar y probar. Una clase que encapsula las llamadas, con docstrings, y pruebas unitarias que simulan la API para correr sin conexión ni costo.</a:t>
+            </a:r>
+          </a:p>
+        </p:txBody>
+      </p:sp>
+    </p:spTree>
+  </p:cSld>
+  <p:clrMapOvr>
+    <a:masterClrMapping/>
+  </p:clrMapOvr>
+</p:notes>
+</file>
+
+<file path=ppt/notesSlides/notesSlide11.xml><?xml version="1.0" encoding="utf-8"?>
+<p:notes xmlns:a="http://schemas.openxmlformats.org/drawingml/2006/main" xmlns:r="http://schemas.openxmlformats.org/officeDocument/2006/relationships" xmlns:p="http://schemas.openxmlformats.org/presentationml/2006/main">
+  <p:cSld>
+    <p:spTree>
+      <p:nvGrpSpPr>
+        <p:cNvPr id="1" name=""/>
+        <p:cNvGrpSpPr/>
+        <p:nvPr/>
+      </p:nvGrpSpPr>
+      <p:grpSpPr>
+        <a:xfrm>
+          <a:off x="0" y="0"/>
+          <a:ext cx="0" cy="0"/>
+          <a:chOff x="0" y="0"/>
+          <a:chExt cx="0" cy="0"/>
+        </a:xfrm>
+      </p:grpSpPr>
+      <p:sp>
+        <p:nvSpPr>
+          <p:cNvPr id="2" name="Imagen de diapositiva"/>
+          <p:cNvSpPr>
+            <a:spLocks noGrp="1" noRot="1" noChangeAspect="1"/>
+          </p:cNvSpPr>
+          <p:nvPr>
+            <p:ph type="sldImg"/>
+          </p:nvPr>
+        </p:nvSpPr>
+        <p:spPr/>
+      </p:sp>
+      <p:sp>
+        <p:nvSpPr>
+          <p:cNvPr id="3" name="Notas"/>
+          <p:cNvSpPr>
+            <a:spLocks noGrp="1"/>
+          </p:cNvSpPr>
+          <p:nvPr>
+            <p:ph type="body" idx="1"/>
+          </p:nvPr>
+        </p:nvSpPr>
+        <p:spPr/>
+        <p:txBody>
+          <a:bodyPr/>
+          <a:lstStyle/>
+          <a:p>
+            <a:r>
+              <a:rPr lang="es-CL" dirty="0"/>
               <a:t>Tu tarea. Notebook guiado y actividad 1, parte B: ClienteIA.</a:t>
             </a:r>
           </a:p>
@@ -279,7 +339,7 @@
           <a:p>
             <a:r>
               <a:rPr lang="es-CL" dirty="0"/>
-              <a:t>REST en dos métodos. GET para leer (listar modelos); POST para enviar datos y pedir un resultado (generar, obtener embeddings).</a:t>
+              <a:t>Esta cápsula corresponde al aprendizaje esperado 2 del plan formativo: Utilizar un modelo de IA a través de API REST utilizando solicitudes HTTP y autenticación, basándose en la documentación oficial de OpenAI y Hugging Face. Sus criterios de evaluación son: Explica la estructura y principales secciones de los endpoints de generación y embeddings de acuerdo con la documentación oficial de OpenAI y Hugging Face. Implementa llamadas HTTP GET y POST a endpoints de completions y embeddings para el consumo de servicios, de acuerdo con la documentación oficial. Implementa una función o clase modular en Python que encapsula la llamada al API y permite reutilizarla con distintos parámetros, documentada con docstrings y pruebas unitarias simples.</a:t>
             </a:r>
           </a:p>
         </p:txBody>
@@ -338,7 +398,7 @@
           <a:p>
             <a:r>
               <a:rPr lang="es-CL" dirty="0"/>
-              <a:t>Leer la documentación oficial. Cómo están organizados los manuales de OpenAI y de Hugging Face: referencia de la API, guías, ejemplos. En cada endpoint buscar URL, autenticación, cuerpo y respuesta.</a:t>
+              <a:t>REST en dos métodos. GET para leer (listar modelos); POST para enviar datos y pedir un resultado (generar, obtener embeddings).</a:t>
             </a:r>
           </a:p>
         </p:txBody>
@@ -397,7 +457,7 @@
           <a:p>
             <a:r>
               <a:rPr lang="es-CL" dirty="0"/>
-              <a:t>Endpoints de generación y de embeddings. Generación: messages con roles, luego texto en choices y consumo en usage. Embeddings: input, luego un vector por texto en data.</a:t>
+              <a:t>Leer la documentación oficial. Cómo están organizados los manuales de OpenAI y de Hugging Face: referencia de la API, guías, ejemplos. En cada endpoint buscar URL, autenticación, cuerpo y respuesta.</a:t>
             </a:r>
           </a:p>
         </p:txBody>
@@ -456,7 +516,7 @@
           <a:p>
             <a:r>
               <a:rPr lang="es-CL" dirty="0"/>
-              <a:t>Autenticación y variables de entorno. Encabezado Authorization: Bearer &lt;clave&gt;; la clave vive en una variable de entorno o en los Secrets del entorno, nunca en el código ni en el repositorio.</a:t>
+              <a:t>Endpoints de generación y de embeddings. Generación: messages con roles, luego texto en choices y consumo en usage. Embeddings: input, luego un vector por texto en data.</a:t>
             </a:r>
           </a:p>
         </p:txBody>
@@ -515,7 +575,7 @@
           <a:p>
             <a:r>
               <a:rPr lang="es-CL" dirty="0"/>
-              <a:t>requests y httpx. Las dos bibliotecas hacen lo mismo en lo básico; httpx suma tiempos de espera claros y una forma sencilla de simular la API en pruebas.</a:t>
+              <a:t>Autenticación y variables de entorno. Encabezado Authorization, con la palabra Bearer y la clave; la clave vive en una variable de entorno o en los Secrets del entorno, nunca en el código ni en el repositorio.</a:t>
             </a:r>
           </a:p>
         </p:txBody>
@@ -574,7 +634,7 @@
           <a:p>
             <a:r>
               <a:rPr lang="es-CL" dirty="0"/>
-              <a:t>Cuerpos JSON y lectura de la respuesta. Armar el diccionario, enviarlo con json=, leer respuesta.json(). Siempre mirar primero status_code.</a:t>
+              <a:t>requests y httpx. Las dos bibliotecas hacen lo mismo en lo básico; httpx suma tiempos de espera claros y una forma sencilla de simular la API en pruebas.</a:t>
             </a:r>
           </a:p>
         </p:txBody>
@@ -633,7 +693,7 @@
           <a:p>
             <a:r>
               <a:rPr lang="es-CL" dirty="0"/>
-              <a:t>Errores del servicio. 401 clave inválida, 429 demasiadas solicitudes (esperar y reintentar), 5xx falla del proveedor. Un mensaje claro vale más que un programa que se cae.</a:t>
+              <a:t>Cuerpos JSON y lectura de la respuesta. Armar el diccionario, enviarlo con el parámetro json, leer respuesta punto json. Siempre mirar primero status code.</a:t>
             </a:r>
           </a:p>
         </p:txBody>
@@ -692,7 +752,7 @@
           <a:p>
             <a:r>
               <a:rPr lang="es-CL" dirty="0"/>
-              <a:t>Modularizar, documentar y probar. Una clase que encapsula las llamadas, con docstrings, y pruebas unitarias que simulan la API para correr sin conexión ni costo.</a:t>
+              <a:t>Errores del servicio. 401 clave inválida, 429 demasiadas solicitudes (esperar y reintentar), 5xx falla del proveedor. Un mensaje claro vale más que un programa que se cae.</a:t>
             </a:r>
           </a:p>
         </p:txBody>
@@ -841,6 +901,39 @@
       </p:sp>
       <p:sp>
         <p:nvSpPr>
+          <p:cNvPr id="7" name="Etiqueta"/>
+          <p:cNvSpPr txBox="1"/>
+          <p:nvPr/>
+        </p:nvSpPr>
+        <p:spPr>
+          <a:xfrm>
+            <a:off x="609600" y="609600"/>
+            <a:ext cx="7315200" cy="533400"/>
+          </a:xfrm>
+          <a:prstGeom prst="rect">
+            <a:avLst/>
+          </a:prstGeom>
+          <a:noFill/>
+        </p:spPr>
+        <p:txBody>
+          <a:bodyPr wrap="square" lIns="0" rIns="0" anchor="b">
+            <a:normAutofit/>
+          </a:bodyPr>
+          <a:lstStyle/>
+          <a:p>
+            <a:r>
+              <a:rPr lang="es-CL" sz="1200" b="1" dirty="0">
+                <a:solidFill>
+                  <a:srgbClr val="9FC3E6"/>
+                </a:solidFill>
+              </a:rPr>
+              <a:t>MÓDULO 2 · INTRODUCCIÓN A MODELOS GENERATIVOS Y CONSUMO POR API</a:t>
+            </a:r>
+          </a:p>
+        </p:txBody>
+      </p:sp>
+      <p:sp>
+        <p:nvSpPr>
           <p:cNvPr id="4" name="Título"/>
           <p:cNvSpPr txBox="1"/>
           <p:nvPr/>
@@ -903,6 +996,16 @@
               <a:t>"Hablar con un modelo es hacer una solicitud HTTP bien hecha".</a:t>
             </a:r>
           </a:p>
+          <a:p>
+            <a:r>
+              <a:rPr lang="es-CL" sz="2200" dirty="0">
+                <a:solidFill>
+                  <a:srgbClr val="E5E7EB"/>
+                </a:solidFill>
+              </a:rPr>
+              <a:t>Contenido del plan: 2. INTEGRACIÓN Y CONSUMO DE APIS</a:t>
+            </a:r>
+          </a:p>
         </p:txBody>
       </p:sp>
       <p:sp>
@@ -933,7 +1036,7 @@
                   <a:srgbClr val="CBD5E1"/>
                 </a:solidFill>
               </a:rPr>
-              <a:t>PF1822 · Módulo 2 · Cápsula 2 · AE2</a:t>
+              <a:t>PF1822 · Módulo 2 · Cápsula 2 · Aprendizaje esperado 2</a:t>
             </a:r>
           </a:p>
         </p:txBody>
@@ -987,14 +1090,77 @@
       </p:sp>
       <p:sp>
         <p:nvSpPr>
+          <p:cNvPr id="7" name="Etiqueta"/>
+          <p:cNvSpPr txBox="1"/>
+          <p:nvPr/>
+        </p:nvSpPr>
+        <p:spPr>
+          <a:xfrm>
+            <a:off x="609600" y="228600"/>
+            <a:ext cx="7315200" cy="914400"/>
+          </a:xfrm>
+          <a:prstGeom prst="rect">
+            <a:avLst/>
+          </a:prstGeom>
+          <a:noFill/>
+        </p:spPr>
+        <p:txBody>
+          <a:bodyPr wrap="square" lIns="0" rIns="0" anchor="b">
+            <a:normAutofit/>
+          </a:bodyPr>
+          <a:lstStyle/>
+          <a:p>
+            <a:r>
+              <a:rPr lang="es-CL" sz="1100" b="1" dirty="0">
+                <a:solidFill>
+                  <a:srgbClr val="0E7490"/>
+                </a:solidFill>
+              </a:rPr>
+              <a:t>CONTENIDO DEL PLAN (TEXTUAL)</a:t>
+            </a:r>
+          </a:p>
+          <a:p>
+            <a:r>
+              <a:rPr lang="es-CL" sz="1100" b="1" dirty="0">
+                <a:solidFill>
+                  <a:srgbClr val="0F3D5E"/>
+                </a:solidFill>
+              </a:rPr>
+              <a:t>MODULARIZACIÓN DE FUNCIONES O CLASES PARA CONSUMO DE APIS.</a:t>
+            </a:r>
+          </a:p>
+          <a:p>
+            <a:r>
+              <a:rPr lang="es-CL" sz="1100" b="1" dirty="0">
+                <a:solidFill>
+                  <a:srgbClr val="0F3D5E"/>
+                </a:solidFill>
+              </a:rPr>
+              <a:t>DOCUMENTACIÓN CON DOCSTRINGS.</a:t>
+            </a:r>
+          </a:p>
+          <a:p>
+            <a:r>
+              <a:rPr lang="es-CL" sz="1100" b="1" dirty="0">
+                <a:solidFill>
+                  <a:srgbClr val="0F3D5E"/>
+                </a:solidFill>
+              </a:rPr>
+              <a:t>PRUEBAS UNITARIAS SIMPLES PARA FUNCIONES DE CONSUMO DE APIS.</a:t>
+            </a:r>
+          </a:p>
+        </p:txBody>
+      </p:sp>
+      <p:sp>
+        <p:nvSpPr>
           <p:cNvPr id="3" name="Título"/>
           <p:cNvSpPr txBox="1"/>
           <p:nvPr/>
         </p:nvSpPr>
         <p:spPr>
           <a:xfrm>
-            <a:off x="609600" y="381000"/>
-            <a:ext cx="7315200" cy="990600"/>
+            <a:off x="609600" y="1181100"/>
+            <a:ext cx="7315200" cy="685800"/>
           </a:xfrm>
           <a:prstGeom prst="rect">
             <a:avLst/>
@@ -1008,12 +1174,12 @@
           <a:lstStyle/>
           <a:p>
             <a:r>
-              <a:rPr lang="es-CL" sz="3200" b="1" dirty="0">
+              <a:rPr lang="es-CL" sz="2800" b="1" dirty="0">
                 <a:solidFill>
                   <a:srgbClr val="0F3D5E"/>
                 </a:solidFill>
               </a:rPr>
-              <a:t>Tu tarea</a:t>
+              <a:t>Modularizar, documentar y probar</a:t>
             </a:r>
           </a:p>
         </p:txBody>
@@ -1026,7 +1192,7 @@
         </p:nvSpPr>
         <p:spPr>
           <a:xfrm>
-            <a:off x="609600" y="1447800"/>
+            <a:off x="609600" y="1943100"/>
             <a:ext cx="1066800" cy="50800"/>
           </a:xfrm>
           <a:prstGeom prst="rect">
@@ -1048,8 +1214,8 @@
         </p:nvSpPr>
         <p:spPr>
           <a:xfrm>
-            <a:off x="609600" y="1676400"/>
-            <a:ext cx="7315200" cy="4419600"/>
+            <a:off x="609600" y="2095500"/>
+            <a:ext cx="7315200" cy="4000500"/>
           </a:xfrm>
           <a:prstGeom prst="rect">
             <a:avLst/>
@@ -1078,7 +1244,7 @@
                   <a:srgbClr val="1F2937"/>
                 </a:solidFill>
               </a:rPr>
-              <a:t>Notebook guiado R05 y actividad 1, parte B: ClienteIA.</a:t>
+              <a:t>Una clase que encapsula las llamadas, con docstrings, y pruebas unitarias que simulan la API para correr sin conexión ni costo.</a:t>
             </a:r>
           </a:p>
         </p:txBody>
@@ -1111,7 +1277,218 @@
                   <a:srgbClr val="6B7280"/>
                 </a:solidFill>
               </a:rPr>
-              <a:t>PF1822 · Módulo 2 · Cápsula 2 · AE2</a:t>
+              <a:t>PF1822 · Módulo 2 · Cápsula 2 · Aprendizaje esperado 2</a:t>
+            </a:r>
+          </a:p>
+        </p:txBody>
+      </p:sp>
+    </p:spTree>
+  </p:cSld>
+  <p:clrMapOvr>
+    <a:masterClrMapping/>
+  </p:clrMapOvr>
+</p:sld>
+</file>
+
+<file path=ppt/slides/slide11.xml><?xml version="1.0" encoding="utf-8"?>
+<p:sld xmlns:a="http://schemas.openxmlformats.org/drawingml/2006/main" xmlns:r="http://schemas.openxmlformats.org/officeDocument/2006/relationships" xmlns:p="http://schemas.openxmlformats.org/presentationml/2006/main">
+  <p:cSld>
+    <p:spTree>
+      <p:nvGrpSpPr>
+        <p:cNvPr id="1" name=""/>
+        <p:cNvGrpSpPr/>
+        <p:nvPr/>
+      </p:nvGrpSpPr>
+      <p:grpSpPr>
+        <a:xfrm>
+          <a:off x="0" y="0"/>
+          <a:ext cx="0" cy="0"/>
+          <a:chOff x="0" y="0"/>
+          <a:chExt cx="0" cy="0"/>
+        </a:xfrm>
+      </p:grpSpPr>
+      <p:sp>
+        <p:nvSpPr>
+          <p:cNvPr id="2" name="Franja 2"/>
+          <p:cNvSpPr/>
+          <p:nvPr/>
+        </p:nvSpPr>
+        <p:spPr>
+          <a:xfrm>
+            <a:off x="0" y="0"/>
+            <a:ext cx="12192000" cy="152400"/>
+          </a:xfrm>
+          <a:prstGeom prst="rect">
+            <a:avLst/>
+          </a:prstGeom>
+          <a:solidFill>
+            <a:srgbClr val="0E7490"/>
+          </a:solidFill>
+          <a:ln>
+            <a:noFill/>
+          </a:ln>
+        </p:spPr>
+      </p:sp>
+      <p:sp>
+        <p:nvSpPr>
+          <p:cNvPr id="7" name="Etiqueta"/>
+          <p:cNvSpPr txBox="1"/>
+          <p:nvPr/>
+        </p:nvSpPr>
+        <p:spPr>
+          <a:xfrm>
+            <a:off x="609600" y="228600"/>
+            <a:ext cx="7315200" cy="914400"/>
+          </a:xfrm>
+          <a:prstGeom prst="rect">
+            <a:avLst/>
+          </a:prstGeom>
+          <a:noFill/>
+        </p:spPr>
+        <p:txBody>
+          <a:bodyPr wrap="square" lIns="0" rIns="0" anchor="b">
+            <a:normAutofit/>
+          </a:bodyPr>
+          <a:lstStyle/>
+          <a:p>
+            <a:r>
+              <a:rPr lang="es-CL" sz="1200" b="1" dirty="0">
+                <a:solidFill>
+                  <a:srgbClr val="0E7490"/>
+                </a:solidFill>
+              </a:rPr>
+              <a:t>PRÁCTICA DEL APRENDIZAJE ESPERADO 2</a:t>
+            </a:r>
+          </a:p>
+        </p:txBody>
+      </p:sp>
+      <p:sp>
+        <p:nvSpPr>
+          <p:cNvPr id="3" name="Título"/>
+          <p:cNvSpPr txBox="1"/>
+          <p:nvPr/>
+        </p:nvSpPr>
+        <p:spPr>
+          <a:xfrm>
+            <a:off x="609600" y="1181100"/>
+            <a:ext cx="7315200" cy="685800"/>
+          </a:xfrm>
+          <a:prstGeom prst="rect">
+            <a:avLst/>
+          </a:prstGeom>
+          <a:noFill/>
+        </p:spPr>
+        <p:txBody>
+          <a:bodyPr wrap="square" lIns="0" rIns="0" anchor="b">
+            <a:normAutofit/>
+          </a:bodyPr>
+          <a:lstStyle/>
+          <a:p>
+            <a:r>
+              <a:rPr lang="es-CL" sz="2800" b="1" dirty="0">
+                <a:solidFill>
+                  <a:srgbClr val="0F3D5E"/>
+                </a:solidFill>
+              </a:rPr>
+              <a:t>Tu tarea</a:t>
+            </a:r>
+          </a:p>
+        </p:txBody>
+      </p:sp>
+      <p:sp>
+        <p:nvSpPr>
+          <p:cNvPr id="4" name="Franja 4"/>
+          <p:cNvSpPr/>
+          <p:nvPr/>
+        </p:nvSpPr>
+        <p:spPr>
+          <a:xfrm>
+            <a:off x="609600" y="1943100"/>
+            <a:ext cx="1066800" cy="50800"/>
+          </a:xfrm>
+          <a:prstGeom prst="rect">
+            <a:avLst/>
+          </a:prstGeom>
+          <a:solidFill>
+            <a:srgbClr val="F59E0B"/>
+          </a:solidFill>
+          <a:ln>
+            <a:noFill/>
+          </a:ln>
+        </p:spPr>
+      </p:sp>
+      <p:sp>
+        <p:nvSpPr>
+          <p:cNvPr id="5" name="Contenido"/>
+          <p:cNvSpPr txBox="1"/>
+          <p:nvPr/>
+        </p:nvSpPr>
+        <p:spPr>
+          <a:xfrm>
+            <a:off x="609600" y="2095500"/>
+            <a:ext cx="7315200" cy="4000500"/>
+          </a:xfrm>
+          <a:prstGeom prst="rect">
+            <a:avLst/>
+          </a:prstGeom>
+          <a:noFill/>
+        </p:spPr>
+        <p:txBody>
+          <a:bodyPr wrap="square" lIns="0" rIns="0" anchor="t">
+            <a:normAutofit/>
+          </a:bodyPr>
+          <a:lstStyle/>
+          <a:p>
+            <a:pPr marL="342900" indent="-342900">
+              <a:spcBef>
+                <a:spcPts val="900"/>
+              </a:spcBef>
+              <a:buClr>
+                <a:srgbClr val="0E7490"/>
+              </a:buClr>
+              <a:buFont typeface="Arial"/>
+              <a:buChar char="•"/>
+            </a:pPr>
+            <a:r>
+              <a:rPr lang="es-CL" sz="2400" dirty="0">
+                <a:solidFill>
+                  <a:srgbClr val="1F2937"/>
+                </a:solidFill>
+              </a:rPr>
+              <a:t>Notebook guiado R05 y actividad 1, parte B: ClienteIA.</a:t>
+            </a:r>
+          </a:p>
+        </p:txBody>
+      </p:sp>
+      <p:sp>
+        <p:nvSpPr>
+          <p:cNvPr id="6" name="Pie"/>
+          <p:cNvSpPr txBox="1"/>
+          <p:nvPr/>
+        </p:nvSpPr>
+        <p:spPr>
+          <a:xfrm>
+            <a:off x="609600" y="6248400"/>
+            <a:ext cx="7315200" cy="381000"/>
+          </a:xfrm>
+          <a:prstGeom prst="rect">
+            <a:avLst/>
+          </a:prstGeom>
+          <a:noFill/>
+        </p:spPr>
+        <p:txBody>
+          <a:bodyPr wrap="square" lIns="0" rIns="0" anchor="t">
+            <a:normAutofit/>
+          </a:bodyPr>
+          <a:lstStyle/>
+          <a:p>
+            <a:r>
+              <a:rPr lang="es-CL" sz="1200" dirty="0">
+                <a:solidFill>
+                  <a:srgbClr val="6B7280"/>
+                </a:solidFill>
+              </a:rPr>
+              <a:t>PF1822 · Módulo 2 · Cápsula 2 · Aprendizaje esperado 2</a:t>
             </a:r>
           </a:p>
         </p:txBody>
@@ -1165,14 +1542,47 @@
       </p:sp>
       <p:sp>
         <p:nvSpPr>
+          <p:cNvPr id="7" name="Etiqueta"/>
+          <p:cNvSpPr txBox="1"/>
+          <p:nvPr/>
+        </p:nvSpPr>
+        <p:spPr>
+          <a:xfrm>
+            <a:off x="609600" y="228600"/>
+            <a:ext cx="7315200" cy="914400"/>
+          </a:xfrm>
+          <a:prstGeom prst="rect">
+            <a:avLst/>
+          </a:prstGeom>
+          <a:noFill/>
+        </p:spPr>
+        <p:txBody>
+          <a:bodyPr wrap="square" lIns="0" rIns="0" anchor="b">
+            <a:normAutofit/>
+          </a:bodyPr>
+          <a:lstStyle/>
+          <a:p>
+            <a:r>
+              <a:rPr lang="es-CL" sz="1200" b="1" dirty="0">
+                <a:solidFill>
+                  <a:srgbClr val="0E7490"/>
+                </a:solidFill>
+              </a:rPr>
+              <a:t>APRENDIZAJE Y CRITERIOS TEXTUALES DEL PLAN FORMATIVO</a:t>
+            </a:r>
+          </a:p>
+        </p:txBody>
+      </p:sp>
+      <p:sp>
+        <p:nvSpPr>
           <p:cNvPr id="3" name="Título"/>
           <p:cNvSpPr txBox="1"/>
           <p:nvPr/>
         </p:nvSpPr>
         <p:spPr>
           <a:xfrm>
-            <a:off x="609600" y="381000"/>
-            <a:ext cx="7315200" cy="990600"/>
+            <a:off x="609600" y="1181100"/>
+            <a:ext cx="7315200" cy="685800"/>
           </a:xfrm>
           <a:prstGeom prst="rect">
             <a:avLst/>
@@ -1186,12 +1596,12 @@
           <a:lstStyle/>
           <a:p>
             <a:r>
-              <a:rPr lang="es-CL" sz="3200" b="1" dirty="0">
+              <a:rPr lang="es-CL" sz="2800" b="1" dirty="0">
                 <a:solidFill>
                   <a:srgbClr val="0F3D5E"/>
                 </a:solidFill>
               </a:rPr>
-              <a:t>REST en dos métodos</a:t>
+              <a:t>Aprendizaje esperado 2</a:t>
             </a:r>
           </a:p>
         </p:txBody>
@@ -1204,7 +1614,7 @@
         </p:nvSpPr>
         <p:spPr>
           <a:xfrm>
-            <a:off x="609600" y="1447800"/>
+            <a:off x="609600" y="1943100"/>
             <a:ext cx="1066800" cy="50800"/>
           </a:xfrm>
           <a:prstGeom prst="rect">
@@ -1226,8 +1636,8 @@
         </p:nvSpPr>
         <p:spPr>
           <a:xfrm>
-            <a:off x="609600" y="1676400"/>
-            <a:ext cx="7315200" cy="4419600"/>
+            <a:off x="609600" y="2095500"/>
+            <a:ext cx="7315200" cy="4000500"/>
           </a:xfrm>
           <a:prstGeom prst="rect">
             <a:avLst/>
@@ -1251,36 +1661,88 @@
               <a:buChar char="•"/>
             </a:pPr>
             <a:r>
-              <a:rPr lang="es-CL" sz="2400" b="1" dirty="0">
+              <a:rPr lang="es-CL" sz="1300" b="1" dirty="0">
                 <a:solidFill>
                   <a:srgbClr val="1F2937"/>
                 </a:solidFill>
               </a:rPr>
-              <a:t>GET</a:t>
-            </a:r>
-            <a:r>
-              <a:rPr lang="es-CL" sz="2400" dirty="0">
+              <a:t>UTILIZAR UN MODELO DE IA A TRAVÉS DE API REST UTILIZANDO SOLICITUDES HTTP Y AUTENTICACIÓN, BASÁNDOSE EN LA DOCUMENTACIÓN OFICIAL DE OPENAI Y HUGGING FACE.</a:t>
+            </a:r>
+          </a:p>
+          <a:p>
+            <a:pPr marL="0" indent="0">
+              <a:spcBef>
+                <a:spcPts val="1400"/>
+              </a:spcBef>
+              <a:buNone/>
+            </a:pPr>
+            <a:r>
+              <a:rPr lang="es-CL" sz="1100" b="1" dirty="0">
+                <a:solidFill>
+                  <a:srgbClr val="0E7490"/>
+                </a:solidFill>
+              </a:rPr>
+              <a:t>CRITERIOS DE EVALUACIÓN</a:t>
+            </a:r>
+          </a:p>
+          <a:p>
+            <a:pPr marL="342900" indent="-342900">
+              <a:spcBef>
+                <a:spcPts val="900"/>
+              </a:spcBef>
+              <a:buClr>
+                <a:srgbClr val="0E7490"/>
+              </a:buClr>
+              <a:buFont typeface="Arial"/>
+              <a:buChar char="•"/>
+            </a:pPr>
+            <a:r>
+              <a:rPr lang="es-CL" sz="1300" dirty="0">
                 <a:solidFill>
                   <a:srgbClr val="1F2937"/>
                 </a:solidFill>
               </a:rPr>
-              <a:t> para leer (listar modelos); </a:t>
-            </a:r>
-            <a:r>
-              <a:rPr lang="es-CL" sz="2400" b="1" dirty="0">
+              <a:t>2.1 EXPLICA LA ESTRUCTURA Y PRINCIPALES SECCIONES DE LOS ENDPOINTS DE GENERACIÓN Y EMBEDDINGS DE ACUERDO CON LA DOCUMENTACIÓN OFICIAL DE OPENAI Y HUGGING FACE.</a:t>
+            </a:r>
+          </a:p>
+          <a:p>
+            <a:pPr marL="342900" indent="-342900">
+              <a:spcBef>
+                <a:spcPts val="900"/>
+              </a:spcBef>
+              <a:buClr>
+                <a:srgbClr val="0E7490"/>
+              </a:buClr>
+              <a:buFont typeface="Arial"/>
+              <a:buChar char="•"/>
+            </a:pPr>
+            <a:r>
+              <a:rPr lang="es-CL" sz="1300" dirty="0">
                 <a:solidFill>
                   <a:srgbClr val="1F2937"/>
                 </a:solidFill>
               </a:rPr>
-              <a:t>POST</a:t>
-            </a:r>
-            <a:r>
-              <a:rPr lang="es-CL" sz="2400" dirty="0">
+              <a:t>2.2 IMPLEMENTA LLAMADAS HTTP GET Y POST A ENDPOINTS DE COMPLETIONS Y EMBEDDINGS PARA EL CONSUMO DE SERVICIOS, DE ACUERDO CON LA DOCUMENTACIÓN OFICIAL.</a:t>
+            </a:r>
+          </a:p>
+          <a:p>
+            <a:pPr marL="342900" indent="-342900">
+              <a:spcBef>
+                <a:spcPts val="900"/>
+              </a:spcBef>
+              <a:buClr>
+                <a:srgbClr val="0E7490"/>
+              </a:buClr>
+              <a:buFont typeface="Arial"/>
+              <a:buChar char="•"/>
+            </a:pPr>
+            <a:r>
+              <a:rPr lang="es-CL" sz="1300" dirty="0">
                 <a:solidFill>
                   <a:srgbClr val="1F2937"/>
                 </a:solidFill>
               </a:rPr>
-              <a:t> para enviar datos y pedir un resultado (generar, obtener embeddings).</a:t>
+              <a:t>2.3 IMPLEMENTA UNA FUNCIÓN O CLASE MODULAR EN PYTHON QUE ENCAPSULA LA LLAMADA AL API Y PERMITE REUTILIZARLA CON DISTINTOS PARÁMETROS, DOCUMENTADA CON DOCSTRINGS Y PRUEBAS UNITARIAS SIMPLES.</a:t>
             </a:r>
           </a:p>
         </p:txBody>
@@ -1313,7 +1775,7 @@
                   <a:srgbClr val="6B7280"/>
                 </a:solidFill>
               </a:rPr>
-              <a:t>PF1822 · Módulo 2 · Cápsula 2 · AE2</a:t>
+              <a:t>PF1822 · Módulo 2 · Cápsula 2 · Aprendizaje esperado 2</a:t>
             </a:r>
           </a:p>
         </p:txBody>
@@ -1367,14 +1829,57 @@
       </p:sp>
       <p:sp>
         <p:nvSpPr>
+          <p:cNvPr id="7" name="Etiqueta"/>
+          <p:cNvSpPr txBox="1"/>
+          <p:nvPr/>
+        </p:nvSpPr>
+        <p:spPr>
+          <a:xfrm>
+            <a:off x="609600" y="228600"/>
+            <a:ext cx="7315200" cy="914400"/>
+          </a:xfrm>
+          <a:prstGeom prst="rect">
+            <a:avLst/>
+          </a:prstGeom>
+          <a:noFill/>
+        </p:spPr>
+        <p:txBody>
+          <a:bodyPr wrap="square" lIns="0" rIns="0" anchor="b">
+            <a:normAutofit/>
+          </a:bodyPr>
+          <a:lstStyle/>
+          <a:p>
+            <a:r>
+              <a:rPr lang="es-CL" sz="1200" b="1" dirty="0">
+                <a:solidFill>
+                  <a:srgbClr val="0E7490"/>
+                </a:solidFill>
+              </a:rPr>
+              <a:t>CONTENIDO DEL PLAN (TEXTUAL)</a:t>
+            </a:r>
+          </a:p>
+          <a:p>
+            <a:r>
+              <a:rPr lang="es-CL" sz="1200" b="1" dirty="0">
+                <a:solidFill>
+                  <a:srgbClr val="0F3D5E"/>
+                </a:solidFill>
+              </a:rPr>
+              <a:t>PRINCIPIOS REST Y MÉTODOS HTTP: GET Y POST.</a:t>
+            </a:r>
+          </a:p>
+        </p:txBody>
+      </p:sp>
+      <p:sp>
+        <p:nvSpPr>
           <p:cNvPr id="3" name="Título"/>
           <p:cNvSpPr txBox="1"/>
           <p:nvPr/>
         </p:nvSpPr>
         <p:spPr>
           <a:xfrm>
-            <a:off x="609600" y="381000"/>
-            <a:ext cx="7315200" cy="990600"/>
+            <a:off x="609600" y="1181100"/>
+            <a:ext cx="7315200" cy="685800"/>
           </a:xfrm>
           <a:prstGeom prst="rect">
             <a:avLst/>
@@ -1388,12 +1893,12 @@
           <a:lstStyle/>
           <a:p>
             <a:r>
-              <a:rPr lang="es-CL" sz="3200" b="1" dirty="0">
+              <a:rPr lang="es-CL" sz="2800" b="1" dirty="0">
                 <a:solidFill>
                   <a:srgbClr val="0F3D5E"/>
                 </a:solidFill>
               </a:rPr>
-              <a:t>Leer la documentación oficial</a:t>
+              <a:t>REST en dos métodos</a:t>
             </a:r>
           </a:p>
         </p:txBody>
@@ -1406,7 +1911,7 @@
         </p:nvSpPr>
         <p:spPr>
           <a:xfrm>
-            <a:off x="609600" y="1447800"/>
+            <a:off x="609600" y="1943100"/>
             <a:ext cx="1066800" cy="50800"/>
           </a:xfrm>
           <a:prstGeom prst="rect">
@@ -1428,8 +1933,8 @@
         </p:nvSpPr>
         <p:spPr>
           <a:xfrm>
-            <a:off x="609600" y="1676400"/>
-            <a:ext cx="7315200" cy="4419600"/>
+            <a:off x="609600" y="2095500"/>
+            <a:ext cx="7315200" cy="4000500"/>
           </a:xfrm>
           <a:prstGeom prst="rect">
             <a:avLst/>
@@ -1453,32 +1958,36 @@
               <a:buChar char="•"/>
             </a:pPr>
             <a:r>
+              <a:rPr lang="es-CL" sz="2400" b="1" dirty="0">
+                <a:solidFill>
+                  <a:srgbClr val="1F2937"/>
+                </a:solidFill>
+              </a:rPr>
+              <a:t>GET</a:t>
+            </a:r>
+            <a:r>
               <a:rPr lang="es-CL" sz="2400" dirty="0">
                 <a:solidFill>
                   <a:srgbClr val="1F2937"/>
                 </a:solidFill>
               </a:rPr>
-              <a:t>Cómo están organizados los manuales de OpenAI y de Hugging Face: referencia de la API, guías, ejemplos.</a:t>
-            </a:r>
-          </a:p>
-          <a:p>
-            <a:pPr marL="342900" indent="-342900">
-              <a:spcBef>
-                <a:spcPts val="900"/>
-              </a:spcBef>
-              <a:buClr>
-                <a:srgbClr val="0E7490"/>
-              </a:buClr>
-              <a:buFont typeface="Arial"/>
-              <a:buChar char="•"/>
-            </a:pPr>
+              <a:t> para leer (listar modelos); </a:t>
+            </a:r>
+            <a:r>
+              <a:rPr lang="es-CL" sz="2400" b="1" dirty="0">
+                <a:solidFill>
+                  <a:srgbClr val="1F2937"/>
+                </a:solidFill>
+              </a:rPr>
+              <a:t>POST</a:t>
+            </a:r>
             <a:r>
               <a:rPr lang="es-CL" sz="2400" dirty="0">
                 <a:solidFill>
                   <a:srgbClr val="1F2937"/>
                 </a:solidFill>
               </a:rPr>
-              <a:t>En cada endpoint buscar URL, autenticación, cuerpo y respuesta.</a:t>
+              <a:t> para enviar datos y pedir un resultado (generar, obtener embeddings).</a:t>
             </a:r>
           </a:p>
         </p:txBody>
@@ -1511,7 +2020,7 @@
                   <a:srgbClr val="6B7280"/>
                 </a:solidFill>
               </a:rPr>
-              <a:t>PF1822 · Módulo 2 · Cápsula 2 · AE2</a:t>
+              <a:t>PF1822 · Módulo 2 · Cápsula 2 · Aprendizaje esperado 2</a:t>
             </a:r>
           </a:p>
         </p:txBody>
@@ -1565,14 +2074,57 @@
       </p:sp>
       <p:sp>
         <p:nvSpPr>
+          <p:cNvPr id="7" name="Etiqueta"/>
+          <p:cNvSpPr txBox="1"/>
+          <p:nvPr/>
+        </p:nvSpPr>
+        <p:spPr>
+          <a:xfrm>
+            <a:off x="609600" y="228600"/>
+            <a:ext cx="7315200" cy="914400"/>
+          </a:xfrm>
+          <a:prstGeom prst="rect">
+            <a:avLst/>
+          </a:prstGeom>
+          <a:noFill/>
+        </p:spPr>
+        <p:txBody>
+          <a:bodyPr wrap="square" lIns="0" rIns="0" anchor="b">
+            <a:normAutofit/>
+          </a:bodyPr>
+          <a:lstStyle/>
+          <a:p>
+            <a:r>
+              <a:rPr lang="es-CL" sz="1200" b="1" dirty="0">
+                <a:solidFill>
+                  <a:srgbClr val="0E7490"/>
+                </a:solidFill>
+              </a:rPr>
+              <a:t>CONTENIDO DEL PLAN (TEXTUAL)</a:t>
+            </a:r>
+          </a:p>
+          <a:p>
+            <a:r>
+              <a:rPr lang="es-CL" sz="1200" b="1" dirty="0">
+                <a:solidFill>
+                  <a:srgbClr val="0F3D5E"/>
+                </a:solidFill>
+              </a:rPr>
+              <a:t>DOCUMENTACIÓN OFICIAL: ENLACES Y ORGANIZACIÓN DE LOS MANUALES DE OPENAI Y HUGGING FACE INFERENCE API.</a:t>
+            </a:r>
+          </a:p>
+        </p:txBody>
+      </p:sp>
+      <p:sp>
+        <p:nvSpPr>
           <p:cNvPr id="3" name="Título"/>
           <p:cNvSpPr txBox="1"/>
           <p:nvPr/>
         </p:nvSpPr>
         <p:spPr>
           <a:xfrm>
-            <a:off x="609600" y="381000"/>
-            <a:ext cx="7315200" cy="990600"/>
+            <a:off x="609600" y="1181100"/>
+            <a:ext cx="7315200" cy="685800"/>
           </a:xfrm>
           <a:prstGeom prst="rect">
             <a:avLst/>
@@ -1586,12 +2138,12 @@
           <a:lstStyle/>
           <a:p>
             <a:r>
-              <a:rPr lang="es-CL" sz="3200" b="1" dirty="0">
+              <a:rPr lang="es-CL" sz="2800" b="1" dirty="0">
                 <a:solidFill>
                   <a:srgbClr val="0F3D5E"/>
                 </a:solidFill>
               </a:rPr>
-              <a:t>Endpoints de generación y de embeddings</a:t>
+              <a:t>Leer la documentación oficial</a:t>
             </a:r>
           </a:p>
         </p:txBody>
@@ -1604,7 +2156,7 @@
         </p:nvSpPr>
         <p:spPr>
           <a:xfrm>
-            <a:off x="609600" y="1447800"/>
+            <a:off x="609600" y="1943100"/>
             <a:ext cx="1066800" cy="50800"/>
           </a:xfrm>
           <a:prstGeom prst="rect">
@@ -1626,8 +2178,8 @@
         </p:nvSpPr>
         <p:spPr>
           <a:xfrm>
-            <a:off x="609600" y="1676400"/>
-            <a:ext cx="7315200" cy="4419600"/>
+            <a:off x="609600" y="2095500"/>
+            <a:ext cx="7315200" cy="4000500"/>
           </a:xfrm>
           <a:prstGeom prst="rect">
             <a:avLst/>
@@ -1656,7 +2208,7 @@
                   <a:srgbClr val="1F2937"/>
                 </a:solidFill>
               </a:rPr>
-              <a:t>Generación: messages con roles → texto en choices y consumo en usage.</a:t>
+              <a:t>Cómo están organizados los manuales de OpenAI y de Hugging Face: referencia de la API, guías, ejemplos.</a:t>
             </a:r>
           </a:p>
           <a:p>
@@ -1676,7 +2228,7 @@
                   <a:srgbClr val="1F2937"/>
                 </a:solidFill>
               </a:rPr>
-              <a:t>Embeddings: input → un vector por texto en data.</a:t>
+              <a:t>En cada endpoint buscar URL, autenticación, cuerpo y respuesta.</a:t>
             </a:r>
           </a:p>
         </p:txBody>
@@ -1709,7 +2261,7 @@
                   <a:srgbClr val="6B7280"/>
                 </a:solidFill>
               </a:rPr>
-              <a:t>PF1822 · Módulo 2 · Cápsula 2 · AE2</a:t>
+              <a:t>PF1822 · Módulo 2 · Cápsula 2 · Aprendizaje esperado 2</a:t>
             </a:r>
           </a:p>
         </p:txBody>
@@ -1763,14 +2315,57 @@
       </p:sp>
       <p:sp>
         <p:nvSpPr>
+          <p:cNvPr id="7" name="Etiqueta"/>
+          <p:cNvSpPr txBox="1"/>
+          <p:nvPr/>
+        </p:nvSpPr>
+        <p:spPr>
+          <a:xfrm>
+            <a:off x="609600" y="228600"/>
+            <a:ext cx="7315200" cy="914400"/>
+          </a:xfrm>
+          <a:prstGeom prst="rect">
+            <a:avLst/>
+          </a:prstGeom>
+          <a:noFill/>
+        </p:spPr>
+        <p:txBody>
+          <a:bodyPr wrap="square" lIns="0" rIns="0" anchor="b">
+            <a:normAutofit/>
+          </a:bodyPr>
+          <a:lstStyle/>
+          <a:p>
+            <a:r>
+              <a:rPr lang="es-CL" sz="1200" b="1" dirty="0">
+                <a:solidFill>
+                  <a:srgbClr val="0E7490"/>
+                </a:solidFill>
+              </a:rPr>
+              <a:t>CONTENIDO DEL PLAN (TEXTUAL)</a:t>
+            </a:r>
+          </a:p>
+          <a:p>
+            <a:r>
+              <a:rPr lang="es-CL" sz="1200" b="1" dirty="0">
+                <a:solidFill>
+                  <a:srgbClr val="0F3D5E"/>
+                </a:solidFill>
+              </a:rPr>
+              <a:t>ENDPOINTS DE GENERACIÓN Y EMBEDDINGS.</a:t>
+            </a:r>
+          </a:p>
+        </p:txBody>
+      </p:sp>
+      <p:sp>
+        <p:nvSpPr>
           <p:cNvPr id="3" name="Título"/>
           <p:cNvSpPr txBox="1"/>
           <p:nvPr/>
         </p:nvSpPr>
         <p:spPr>
           <a:xfrm>
-            <a:off x="609600" y="381000"/>
-            <a:ext cx="7315200" cy="990600"/>
+            <a:off x="609600" y="1181100"/>
+            <a:ext cx="7315200" cy="685800"/>
           </a:xfrm>
           <a:prstGeom prst="rect">
             <a:avLst/>
@@ -1784,12 +2379,12 @@
           <a:lstStyle/>
           <a:p>
             <a:r>
-              <a:rPr lang="es-CL" sz="3200" b="1" dirty="0">
+              <a:rPr lang="es-CL" sz="2800" b="1" dirty="0">
                 <a:solidFill>
                   <a:srgbClr val="0F3D5E"/>
                 </a:solidFill>
               </a:rPr>
-              <a:t>Autenticación y variables de entorno</a:t>
+              <a:t>Endpoints de generación y de embeddings</a:t>
             </a:r>
           </a:p>
         </p:txBody>
@@ -1802,7 +2397,7 @@
         </p:nvSpPr>
         <p:spPr>
           <a:xfrm>
-            <a:off x="609600" y="1447800"/>
+            <a:off x="609600" y="1943100"/>
             <a:ext cx="1066800" cy="50800"/>
           </a:xfrm>
           <a:prstGeom prst="rect">
@@ -1824,8 +2419,8 @@
         </p:nvSpPr>
         <p:spPr>
           <a:xfrm>
-            <a:off x="609600" y="1676400"/>
-            <a:ext cx="7315200" cy="4419600"/>
+            <a:off x="609600" y="2095500"/>
+            <a:ext cx="7315200" cy="4000500"/>
           </a:xfrm>
           <a:prstGeom prst="rect">
             <a:avLst/>
@@ -1854,7 +2449,27 @@
                   <a:srgbClr val="1F2937"/>
                 </a:solidFill>
               </a:rPr>
-              <a:t>Encabezado Authorization: Bearer &lt;clave&gt;; la clave vive en una variable de entorno o en los Secrets del entorno, nunca en el código ni en el repositorio.</a:t>
+              <a:t>Generación: messages con roles → texto en choices y consumo en usage.</a:t>
+            </a:r>
+          </a:p>
+          <a:p>
+            <a:pPr marL="342900" indent="-342900">
+              <a:spcBef>
+                <a:spcPts val="900"/>
+              </a:spcBef>
+              <a:buClr>
+                <a:srgbClr val="0E7490"/>
+              </a:buClr>
+              <a:buFont typeface="Arial"/>
+              <a:buChar char="•"/>
+            </a:pPr>
+            <a:r>
+              <a:rPr lang="es-CL" sz="2400" dirty="0">
+                <a:solidFill>
+                  <a:srgbClr val="1F2937"/>
+                </a:solidFill>
+              </a:rPr>
+              <a:t>Embeddings: input → un vector por texto en data.</a:t>
             </a:r>
           </a:p>
         </p:txBody>
@@ -1887,7 +2502,7 @@
                   <a:srgbClr val="6B7280"/>
                 </a:solidFill>
               </a:rPr>
-              <a:t>PF1822 · Módulo 2 · Cápsula 2 · AE2</a:t>
+              <a:t>PF1822 · Módulo 2 · Cápsula 2 · Aprendizaje esperado 2</a:t>
             </a:r>
           </a:p>
         </p:txBody>
@@ -1941,14 +2556,57 @@
       </p:sp>
       <p:sp>
         <p:nvSpPr>
+          <p:cNvPr id="7" name="Etiqueta"/>
+          <p:cNvSpPr txBox="1"/>
+          <p:nvPr/>
+        </p:nvSpPr>
+        <p:spPr>
+          <a:xfrm>
+            <a:off x="609600" y="228600"/>
+            <a:ext cx="7315200" cy="914400"/>
+          </a:xfrm>
+          <a:prstGeom prst="rect">
+            <a:avLst/>
+          </a:prstGeom>
+          <a:noFill/>
+        </p:spPr>
+        <p:txBody>
+          <a:bodyPr wrap="square" lIns="0" rIns="0" anchor="b">
+            <a:normAutofit/>
+          </a:bodyPr>
+          <a:lstStyle/>
+          <a:p>
+            <a:r>
+              <a:rPr lang="es-CL" sz="1200" b="1" dirty="0">
+                <a:solidFill>
+                  <a:srgbClr val="0E7490"/>
+                </a:solidFill>
+              </a:rPr>
+              <a:t>CONTENIDO DEL PLAN (TEXTUAL)</a:t>
+            </a:r>
+          </a:p>
+          <a:p>
+            <a:r>
+              <a:rPr lang="es-CL" sz="1200" b="1" dirty="0">
+                <a:solidFill>
+                  <a:srgbClr val="0F3D5E"/>
+                </a:solidFill>
+              </a:rPr>
+              <a:t>GESTIÓN DE AUTENTICACIÓN Y VARIABLES DE ENTORNO.</a:t>
+            </a:r>
+          </a:p>
+        </p:txBody>
+      </p:sp>
+      <p:sp>
+        <p:nvSpPr>
           <p:cNvPr id="3" name="Título"/>
           <p:cNvSpPr txBox="1"/>
           <p:nvPr/>
         </p:nvSpPr>
         <p:spPr>
           <a:xfrm>
-            <a:off x="609600" y="381000"/>
-            <a:ext cx="7315200" cy="990600"/>
+            <a:off x="609600" y="1181100"/>
+            <a:ext cx="7315200" cy="685800"/>
           </a:xfrm>
           <a:prstGeom prst="rect">
             <a:avLst/>
@@ -1962,12 +2620,12 @@
           <a:lstStyle/>
           <a:p>
             <a:r>
-              <a:rPr lang="es-CL" sz="3200" b="1" dirty="0">
+              <a:rPr lang="es-CL" sz="2800" b="1" dirty="0">
                 <a:solidFill>
                   <a:srgbClr val="0F3D5E"/>
                 </a:solidFill>
               </a:rPr>
-              <a:t>requests y httpx</a:t>
+              <a:t>Autenticación y variables de entorno</a:t>
             </a:r>
           </a:p>
         </p:txBody>
@@ -1980,7 +2638,7 @@
         </p:nvSpPr>
         <p:spPr>
           <a:xfrm>
-            <a:off x="609600" y="1447800"/>
+            <a:off x="609600" y="1943100"/>
             <a:ext cx="1066800" cy="50800"/>
           </a:xfrm>
           <a:prstGeom prst="rect">
@@ -2002,8 +2660,8 @@
         </p:nvSpPr>
         <p:spPr>
           <a:xfrm>
-            <a:off x="609600" y="1676400"/>
-            <a:ext cx="7315200" cy="4419600"/>
+            <a:off x="609600" y="2095500"/>
+            <a:ext cx="7315200" cy="4000500"/>
           </a:xfrm>
           <a:prstGeom prst="rect">
             <a:avLst/>
@@ -2032,7 +2690,7 @@
                   <a:srgbClr val="1F2937"/>
                 </a:solidFill>
               </a:rPr>
-              <a:t>Las dos bibliotecas hacen lo mismo en lo básico; httpx suma tiempos de espera claros y una forma sencilla de simular la API en pruebas.</a:t>
+              <a:t>Encabezado Authorization: Bearer &lt;clave&gt;; la clave vive en una variable de entorno o en los Secrets del entorno, nunca en el código ni en el repositorio.</a:t>
             </a:r>
           </a:p>
         </p:txBody>
@@ -2065,7 +2723,7 @@
                   <a:srgbClr val="6B7280"/>
                 </a:solidFill>
               </a:rPr>
-              <a:t>PF1822 · Módulo 2 · Cápsula 2 · AE2</a:t>
+              <a:t>PF1822 · Módulo 2 · Cápsula 2 · Aprendizaje esperado 2</a:t>
             </a:r>
           </a:p>
         </p:txBody>
@@ -2119,14 +2777,57 @@
       </p:sp>
       <p:sp>
         <p:nvSpPr>
+          <p:cNvPr id="7" name="Etiqueta"/>
+          <p:cNvSpPr txBox="1"/>
+          <p:nvPr/>
+        </p:nvSpPr>
+        <p:spPr>
+          <a:xfrm>
+            <a:off x="609600" y="228600"/>
+            <a:ext cx="7315200" cy="914400"/>
+          </a:xfrm>
+          <a:prstGeom prst="rect">
+            <a:avLst/>
+          </a:prstGeom>
+          <a:noFill/>
+        </p:spPr>
+        <p:txBody>
+          <a:bodyPr wrap="square" lIns="0" rIns="0" anchor="b">
+            <a:normAutofit/>
+          </a:bodyPr>
+          <a:lstStyle/>
+          <a:p>
+            <a:r>
+              <a:rPr lang="es-CL" sz="1200" b="1" dirty="0">
+                <a:solidFill>
+                  <a:srgbClr val="0E7490"/>
+                </a:solidFill>
+              </a:rPr>
+              <a:t>CONTENIDO DEL PLAN (TEXTUAL)</a:t>
+            </a:r>
+          </a:p>
+          <a:p>
+            <a:r>
+              <a:rPr lang="es-CL" sz="1200" b="1" dirty="0">
+                <a:solidFill>
+                  <a:srgbClr val="0F3D5E"/>
+                </a:solidFill>
+              </a:rPr>
+              <a:t>LIBRERÍAS: REQUESTS Y HTTPX.</a:t>
+            </a:r>
+          </a:p>
+        </p:txBody>
+      </p:sp>
+      <p:sp>
+        <p:nvSpPr>
           <p:cNvPr id="3" name="Título"/>
           <p:cNvSpPr txBox="1"/>
           <p:nvPr/>
         </p:nvSpPr>
         <p:spPr>
           <a:xfrm>
-            <a:off x="609600" y="381000"/>
-            <a:ext cx="7315200" cy="990600"/>
+            <a:off x="609600" y="1181100"/>
+            <a:ext cx="7315200" cy="685800"/>
           </a:xfrm>
           <a:prstGeom prst="rect">
             <a:avLst/>
@@ -2140,12 +2841,12 @@
           <a:lstStyle/>
           <a:p>
             <a:r>
-              <a:rPr lang="es-CL" sz="3200" b="1" dirty="0">
+              <a:rPr lang="es-CL" sz="2800" b="1" dirty="0">
                 <a:solidFill>
                   <a:srgbClr val="0F3D5E"/>
                 </a:solidFill>
               </a:rPr>
-              <a:t>Cuerpos JSON y lectura de la respuesta</a:t>
+              <a:t>requests y httpx</a:t>
             </a:r>
           </a:p>
         </p:txBody>
@@ -2158,7 +2859,7 @@
         </p:nvSpPr>
         <p:spPr>
           <a:xfrm>
-            <a:off x="609600" y="1447800"/>
+            <a:off x="609600" y="1943100"/>
             <a:ext cx="1066800" cy="50800"/>
           </a:xfrm>
           <a:prstGeom prst="rect">
@@ -2180,8 +2881,8 @@
         </p:nvSpPr>
         <p:spPr>
           <a:xfrm>
-            <a:off x="609600" y="1676400"/>
-            <a:ext cx="7315200" cy="4419600"/>
+            <a:off x="609600" y="2095500"/>
+            <a:ext cx="7315200" cy="4000500"/>
           </a:xfrm>
           <a:prstGeom prst="rect">
             <a:avLst/>
@@ -2210,27 +2911,7 @@
                   <a:srgbClr val="1F2937"/>
                 </a:solidFill>
               </a:rPr>
-              <a:t>Armar el diccionario, enviarlo con json=, leer respuesta.json().</a:t>
-            </a:r>
-          </a:p>
-          <a:p>
-            <a:pPr marL="342900" indent="-342900">
-              <a:spcBef>
-                <a:spcPts val="900"/>
-              </a:spcBef>
-              <a:buClr>
-                <a:srgbClr val="0E7490"/>
-              </a:buClr>
-              <a:buFont typeface="Arial"/>
-              <a:buChar char="•"/>
-            </a:pPr>
-            <a:r>
-              <a:rPr lang="es-CL" sz="2400" dirty="0">
-                <a:solidFill>
-                  <a:srgbClr val="1F2937"/>
-                </a:solidFill>
-              </a:rPr>
-              <a:t>Siempre mirar primero status_code.</a:t>
+              <a:t>Las dos bibliotecas hacen lo mismo en lo básico; httpx suma tiempos de espera claros y una forma sencilla de simular la API en pruebas.</a:t>
             </a:r>
           </a:p>
         </p:txBody>
@@ -2263,7 +2944,7 @@
                   <a:srgbClr val="6B7280"/>
                 </a:solidFill>
               </a:rPr>
-              <a:t>PF1822 · Módulo 2 · Cápsula 2 · AE2</a:t>
+              <a:t>PF1822 · Módulo 2 · Cápsula 2 · Aprendizaje esperado 2</a:t>
             </a:r>
           </a:p>
         </p:txBody>
@@ -2317,14 +2998,57 @@
       </p:sp>
       <p:sp>
         <p:nvSpPr>
+          <p:cNvPr id="7" name="Etiqueta"/>
+          <p:cNvSpPr txBox="1"/>
+          <p:nvPr/>
+        </p:nvSpPr>
+        <p:spPr>
+          <a:xfrm>
+            <a:off x="609600" y="228600"/>
+            <a:ext cx="7315200" cy="914400"/>
+          </a:xfrm>
+          <a:prstGeom prst="rect">
+            <a:avLst/>
+          </a:prstGeom>
+          <a:noFill/>
+        </p:spPr>
+        <p:txBody>
+          <a:bodyPr wrap="square" lIns="0" rIns="0" anchor="b">
+            <a:normAutofit/>
+          </a:bodyPr>
+          <a:lstStyle/>
+          <a:p>
+            <a:r>
+              <a:rPr lang="es-CL" sz="1200" b="1" dirty="0">
+                <a:solidFill>
+                  <a:srgbClr val="0E7490"/>
+                </a:solidFill>
+              </a:rPr>
+              <a:t>CONTENIDO DEL PLAN (TEXTUAL)</a:t>
+            </a:r>
+          </a:p>
+          <a:p>
+            <a:r>
+              <a:rPr lang="es-CL" sz="1200" b="1" dirty="0">
+                <a:solidFill>
+                  <a:srgbClr val="0F3D5E"/>
+                </a:solidFill>
+              </a:rPr>
+              <a:t>EJEMPLOS DE USO: PARÁMETROS, CUERPOS JSON Y PARSING DE RESPUESTA.</a:t>
+            </a:r>
+          </a:p>
+        </p:txBody>
+      </p:sp>
+      <p:sp>
+        <p:nvSpPr>
           <p:cNvPr id="3" name="Título"/>
           <p:cNvSpPr txBox="1"/>
           <p:nvPr/>
         </p:nvSpPr>
         <p:spPr>
           <a:xfrm>
-            <a:off x="609600" y="381000"/>
-            <a:ext cx="7315200" cy="990600"/>
+            <a:off x="609600" y="1181100"/>
+            <a:ext cx="7315200" cy="685800"/>
           </a:xfrm>
           <a:prstGeom prst="rect">
             <a:avLst/>
@@ -2338,12 +3062,12 @@
           <a:lstStyle/>
           <a:p>
             <a:r>
-              <a:rPr lang="es-CL" sz="3200" b="1" dirty="0">
+              <a:rPr lang="es-CL" sz="2800" b="1" dirty="0">
                 <a:solidFill>
                   <a:srgbClr val="0F3D5E"/>
                 </a:solidFill>
               </a:rPr>
-              <a:t>Errores del servicio</a:t>
+              <a:t>Cuerpos JSON y lectura de la respuesta</a:t>
             </a:r>
           </a:p>
         </p:txBody>
@@ -2356,7 +3080,7 @@
         </p:nvSpPr>
         <p:spPr>
           <a:xfrm>
-            <a:off x="609600" y="1447800"/>
+            <a:off x="609600" y="1943100"/>
             <a:ext cx="1066800" cy="50800"/>
           </a:xfrm>
           <a:prstGeom prst="rect">
@@ -2378,8 +3102,8 @@
         </p:nvSpPr>
         <p:spPr>
           <a:xfrm>
-            <a:off x="609600" y="1676400"/>
-            <a:ext cx="7315200" cy="4419600"/>
+            <a:off x="609600" y="2095500"/>
+            <a:ext cx="7315200" cy="4000500"/>
           </a:xfrm>
           <a:prstGeom prst="rect">
             <a:avLst/>
@@ -2408,7 +3132,7 @@
                   <a:srgbClr val="1F2937"/>
                 </a:solidFill>
               </a:rPr>
-              <a:t>401 clave inválida · 429 demasiadas solicitudes (esperar y reintentar) · 5xx falla del proveedor.</a:t>
+              <a:t>Armar el diccionario, enviarlo con json=, leer respuesta.json().</a:t>
             </a:r>
           </a:p>
           <a:p>
@@ -2428,7 +3152,7 @@
                   <a:srgbClr val="1F2937"/>
                 </a:solidFill>
               </a:rPr>
-              <a:t>Un mensaje claro vale más que un programa que se cae.</a:t>
+              <a:t>Siempre mirar primero status_code.</a:t>
             </a:r>
           </a:p>
         </p:txBody>
@@ -2461,7 +3185,7 @@
                   <a:srgbClr val="6B7280"/>
                 </a:solidFill>
               </a:rPr>
-              <a:t>PF1822 · Módulo 2 · Cápsula 2 · AE2</a:t>
+              <a:t>PF1822 · Módulo 2 · Cápsula 2 · Aprendizaje esperado 2</a:t>
             </a:r>
           </a:p>
         </p:txBody>
@@ -2515,14 +3239,57 @@
       </p:sp>
       <p:sp>
         <p:nvSpPr>
+          <p:cNvPr id="7" name="Etiqueta"/>
+          <p:cNvSpPr txBox="1"/>
+          <p:nvPr/>
+        </p:nvSpPr>
+        <p:spPr>
+          <a:xfrm>
+            <a:off x="609600" y="228600"/>
+            <a:ext cx="7315200" cy="914400"/>
+          </a:xfrm>
+          <a:prstGeom prst="rect">
+            <a:avLst/>
+          </a:prstGeom>
+          <a:noFill/>
+        </p:spPr>
+        <p:txBody>
+          <a:bodyPr wrap="square" lIns="0" rIns="0" anchor="b">
+            <a:normAutofit/>
+          </a:bodyPr>
+          <a:lstStyle/>
+          <a:p>
+            <a:r>
+              <a:rPr lang="es-CL" sz="1200" b="1" dirty="0">
+                <a:solidFill>
+                  <a:srgbClr val="0E7490"/>
+                </a:solidFill>
+              </a:rPr>
+              <a:t>CONTENIDO DEL PLAN (TEXTUAL)</a:t>
+            </a:r>
+          </a:p>
+          <a:p>
+            <a:r>
+              <a:rPr lang="es-CL" sz="1200" b="1" dirty="0">
+                <a:solidFill>
+                  <a:srgbClr val="0F3D5E"/>
+                </a:solidFill>
+              </a:rPr>
+              <a:t>MANEJO BÁSICO DE ERRORES Y RESPUESTAS DEL SERVICIO.</a:t>
+            </a:r>
+          </a:p>
+        </p:txBody>
+      </p:sp>
+      <p:sp>
+        <p:nvSpPr>
           <p:cNvPr id="3" name="Título"/>
           <p:cNvSpPr txBox="1"/>
           <p:nvPr/>
         </p:nvSpPr>
         <p:spPr>
           <a:xfrm>
-            <a:off x="609600" y="381000"/>
-            <a:ext cx="7315200" cy="990600"/>
+            <a:off x="609600" y="1181100"/>
+            <a:ext cx="7315200" cy="685800"/>
           </a:xfrm>
           <a:prstGeom prst="rect">
             <a:avLst/>
@@ -2536,12 +3303,12 @@
           <a:lstStyle/>
           <a:p>
             <a:r>
-              <a:rPr lang="es-CL" sz="3200" b="1" dirty="0">
+              <a:rPr lang="es-CL" sz="2800" b="1" dirty="0">
                 <a:solidFill>
                   <a:srgbClr val="0F3D5E"/>
                 </a:solidFill>
               </a:rPr>
-              <a:t>Modularizar, documentar y probar</a:t>
+              <a:t>Errores del servicio</a:t>
             </a:r>
           </a:p>
         </p:txBody>
@@ -2554,7 +3321,7 @@
         </p:nvSpPr>
         <p:spPr>
           <a:xfrm>
-            <a:off x="609600" y="1447800"/>
+            <a:off x="609600" y="1943100"/>
             <a:ext cx="1066800" cy="50800"/>
           </a:xfrm>
           <a:prstGeom prst="rect">
@@ -2576,8 +3343,8 @@
         </p:nvSpPr>
         <p:spPr>
           <a:xfrm>
-            <a:off x="609600" y="1676400"/>
-            <a:ext cx="7315200" cy="4419600"/>
+            <a:off x="609600" y="2095500"/>
+            <a:ext cx="7315200" cy="4000500"/>
           </a:xfrm>
           <a:prstGeom prst="rect">
             <a:avLst/>
@@ -2606,7 +3373,27 @@
                   <a:srgbClr val="1F2937"/>
                 </a:solidFill>
               </a:rPr>
-              <a:t>Una clase que encapsula las llamadas, con docstrings, y pruebas unitarias que simulan la API para correr sin conexión ni costo.</a:t>
+              <a:t>401 clave inválida · 429 demasiadas solicitudes (esperar y reintentar) · 5xx falla del proveedor.</a:t>
+            </a:r>
+          </a:p>
+          <a:p>
+            <a:pPr marL="342900" indent="-342900">
+              <a:spcBef>
+                <a:spcPts val="900"/>
+              </a:spcBef>
+              <a:buClr>
+                <a:srgbClr val="0E7490"/>
+              </a:buClr>
+              <a:buFont typeface="Arial"/>
+              <a:buChar char="•"/>
+            </a:pPr>
+            <a:r>
+              <a:rPr lang="es-CL" sz="2400" dirty="0">
+                <a:solidFill>
+                  <a:srgbClr val="1F2937"/>
+                </a:solidFill>
+              </a:rPr>
+              <a:t>Un mensaje claro vale más que un programa que se cae.</a:t>
             </a:r>
           </a:p>
         </p:txBody>
@@ -2639,7 +3426,7 @@
                   <a:srgbClr val="6B7280"/>
                 </a:solidFill>
               </a:rPr>
-              <a:t>PF1822 · Módulo 2 · Cápsula 2 · AE2</a:t>
+              <a:t>PF1822 · Módulo 2 · Cápsula 2 · Aprendizaje esperado 2</a:t>
             </a:r>
           </a:p>
         </p:txBody>
